--- a/assets/powerpoints/module-n2-couloirs/A3-ou-est-ou-sont.pptx
+++ b/assets/powerpoints/module-n2-couloirs/A3-ou-est-ou-sont.pptx
@@ -8764,7 +8764,61 @@
                 </a:solidFill>
                 <a:latin typeface="Verdana"/>
               </a:rPr>
-              <a:t>On aborde avec « &lt;b&gt;excusez-moi&lt;/b&gt; », on pose &lt;b&gt;une seule&lt;/b&gt; question, on &lt;b&gt;remercie&lt;/b&gt;. Deux questions à la fois donnent une réponse trop longue, dont on ne retient rien.</a:t>
+              <a:t>On aborde avec « </a:t>
+            </a:r>
+            <a:r>
+              <a:rPr sz="2000" b="1" i="0">
+                <a:solidFill>
+                  <a:srgbClr val="4B4F52"/>
+                </a:solidFill>
+                <a:latin typeface="Verdana"/>
+              </a:rPr>
+              <a:t>excusez-moi</a:t>
+            </a:r>
+            <a:r>
+              <a:rPr sz="2000" b="0" i="0">
+                <a:solidFill>
+                  <a:srgbClr val="4B4F52"/>
+                </a:solidFill>
+                <a:latin typeface="Verdana"/>
+              </a:rPr>
+              <a:t> », on pose </a:t>
+            </a:r>
+            <a:r>
+              <a:rPr sz="2000" b="1" i="0">
+                <a:solidFill>
+                  <a:srgbClr val="4B4F52"/>
+                </a:solidFill>
+                <a:latin typeface="Verdana"/>
+              </a:rPr>
+              <a:t>une seule</a:t>
+            </a:r>
+            <a:r>
+              <a:rPr sz="2000" b="0" i="0">
+                <a:solidFill>
+                  <a:srgbClr val="4B4F52"/>
+                </a:solidFill>
+                <a:latin typeface="Verdana"/>
+              </a:rPr>
+              <a:t> question, on </a:t>
+            </a:r>
+            <a:r>
+              <a:rPr sz="2000" b="1" i="0">
+                <a:solidFill>
+                  <a:srgbClr val="4B4F52"/>
+                </a:solidFill>
+                <a:latin typeface="Verdana"/>
+              </a:rPr>
+              <a:t>remercie</a:t>
+            </a:r>
+            <a:r>
+              <a:rPr sz="2000" b="0" i="0">
+                <a:solidFill>
+                  <a:srgbClr val="4B4F52"/>
+                </a:solidFill>
+                <a:latin typeface="Verdana"/>
+              </a:rPr>
+              <a:t>. Deux questions à la fois donnent une réponse trop longue, dont on ne retient rien.</a:t>
             </a:r>
           </a:p>
         </p:txBody>
